--- a/ibolyApp-1.pptx
+++ b/ibolyApp-1.pptx
@@ -5,15 +5,16 @@
     <p:sldMasterId id="2147483712" r:id="rId1"/>
   </p:sldMasterIdLst>
   <p:notesMasterIdLst>
-    <p:notesMasterId r:id="rId8"/>
+    <p:notesMasterId r:id="rId9"/>
   </p:notesMasterIdLst>
   <p:sldIdLst>
     <p:sldId id="256" r:id="rId2"/>
     <p:sldId id="258" r:id="rId3"/>
     <p:sldId id="259" r:id="rId4"/>
     <p:sldId id="260" r:id="rId5"/>
-    <p:sldId id="257" r:id="rId6"/>
-    <p:sldId id="262" r:id="rId7"/>
+    <p:sldId id="263" r:id="rId6"/>
+    <p:sldId id="257" r:id="rId7"/>
+    <p:sldId id="262" r:id="rId8"/>
   </p:sldIdLst>
   <p:sldSz cx="12192000" cy="6858000"/>
   <p:notesSz cx="6858000" cy="9144000"/>
@@ -202,7 +203,7 @@
           <a:p>
             <a:fld id="{1FCAD7AD-A44C-4C9D-9A5E-EF6B08EF8255}" type="datetimeFigureOut">
               <a:rPr lang="hu-HU" smtClean="0"/>
-              <a:t>2024. 12. 11.</a:t>
+              <a:t>2024. 12. 12.</a:t>
             </a:fld>
             <a:endParaRPr lang="hu-HU"/>
           </a:p>
@@ -553,6 +554,114 @@
 </p:notes>
 </file>
 
+<file path=ppt/notesSlides/notesSlide2.xml><?xml version="1.0" encoding="utf-8"?>
+<p:notes xmlns:a="http://schemas.openxmlformats.org/drawingml/2006/main" xmlns:r="http://schemas.openxmlformats.org/officeDocument/2006/relationships" xmlns:p="http://schemas.openxmlformats.org/presentationml/2006/main">
+  <p:cSld>
+    <p:spTree>
+      <p:nvGrpSpPr>
+        <p:cNvPr id="1" name="">
+          <a:extLst>
+            <a:ext uri="{FF2B5EF4-FFF2-40B4-BE49-F238E27FC236}">
+              <a16:creationId xmlns:a16="http://schemas.microsoft.com/office/drawing/2014/main" id="{AA372B84-58F8-5E60-33CA-029C9C2E8F0A}"/>
+            </a:ext>
+          </a:extLst>
+        </p:cNvPr>
+        <p:cNvGrpSpPr/>
+        <p:nvPr/>
+      </p:nvGrpSpPr>
+      <p:grpSpPr>
+        <a:xfrm>
+          <a:off x="0" y="0"/>
+          <a:ext cx="0" cy="0"/>
+          <a:chOff x="0" y="0"/>
+          <a:chExt cx="0" cy="0"/>
+        </a:xfrm>
+      </p:grpSpPr>
+      <p:sp>
+        <p:nvSpPr>
+          <p:cNvPr id="2" name="Diakép helye 1">
+            <a:extLst>
+              <a:ext uri="{FF2B5EF4-FFF2-40B4-BE49-F238E27FC236}">
+                <a16:creationId xmlns:a16="http://schemas.microsoft.com/office/drawing/2014/main" id="{22093237-D9A1-8E40-DF3F-0E274278E8F4}"/>
+              </a:ext>
+            </a:extLst>
+          </p:cNvPr>
+          <p:cNvSpPr>
+            <a:spLocks noGrp="1" noRot="1" noChangeAspect="1"/>
+          </p:cNvSpPr>
+          <p:nvPr>
+            <p:ph type="sldImg"/>
+          </p:nvPr>
+        </p:nvSpPr>
+        <p:spPr/>
+      </p:sp>
+      <p:sp>
+        <p:nvSpPr>
+          <p:cNvPr id="3" name="Jegyzetek helye 2">
+            <a:extLst>
+              <a:ext uri="{FF2B5EF4-FFF2-40B4-BE49-F238E27FC236}">
+                <a16:creationId xmlns:a16="http://schemas.microsoft.com/office/drawing/2014/main" id="{3493032F-DD7D-A0E3-705E-405724F22320}"/>
+              </a:ext>
+            </a:extLst>
+          </p:cNvPr>
+          <p:cNvSpPr>
+            <a:spLocks noGrp="1"/>
+          </p:cNvSpPr>
+          <p:nvPr>
+            <p:ph type="body" idx="1"/>
+          </p:nvPr>
+        </p:nvSpPr>
+        <p:spPr/>
+        <p:txBody>
+          <a:bodyPr/>
+          <a:lstStyle/>
+          <a:p>
+            <a:endParaRPr lang="hu-HU" dirty="0"/>
+          </a:p>
+        </p:txBody>
+      </p:sp>
+      <p:sp>
+        <p:nvSpPr>
+          <p:cNvPr id="4" name="Dia számának helye 3">
+            <a:extLst>
+              <a:ext uri="{FF2B5EF4-FFF2-40B4-BE49-F238E27FC236}">
+                <a16:creationId xmlns:a16="http://schemas.microsoft.com/office/drawing/2014/main" id="{3E98414C-4827-B213-8B08-52EEE619583D}"/>
+              </a:ext>
+            </a:extLst>
+          </p:cNvPr>
+          <p:cNvSpPr>
+            <a:spLocks noGrp="1"/>
+          </p:cNvSpPr>
+          <p:nvPr>
+            <p:ph type="sldNum" sz="quarter" idx="10"/>
+          </p:nvPr>
+        </p:nvSpPr>
+        <p:spPr/>
+        <p:txBody>
+          <a:bodyPr/>
+          <a:lstStyle/>
+          <a:p>
+            <a:fld id="{668CABCB-2285-41B2-9965-EA0F0C6DE5E8}" type="slidenum">
+              <a:rPr lang="hu-HU" smtClean="0"/>
+              <a:t>5</a:t>
+            </a:fld>
+            <a:endParaRPr lang="hu-HU"/>
+          </a:p>
+        </p:txBody>
+      </p:sp>
+    </p:spTree>
+    <p:extLst>
+      <p:ext uri="{BB962C8B-B14F-4D97-AF65-F5344CB8AC3E}">
+        <p14:creationId xmlns:p14="http://schemas.microsoft.com/office/powerpoint/2010/main" val="605835563"/>
+      </p:ext>
+    </p:extLst>
+  </p:cSld>
+  <p:clrMapOvr>
+    <a:masterClrMapping/>
+  </p:clrMapOvr>
+</p:notes>
+</file>
+
 <file path=ppt/slideLayouts/slideLayout1.xml><?xml version="1.0" encoding="utf-8"?>
 <p:sldLayout xmlns:a="http://schemas.openxmlformats.org/drawingml/2006/main" xmlns:r="http://schemas.openxmlformats.org/officeDocument/2006/relationships" xmlns:p="http://schemas.openxmlformats.org/presentationml/2006/main" type="title" preserve="1">
   <p:cSld name="Title Slide">
@@ -704,7 +813,7 @@
           <a:p>
             <a:fld id="{4CDE23C7-78A4-413A-A84B-93D4CC0A9EB1}" type="datetimeFigureOut">
               <a:rPr lang="en-US" smtClean="0"/>
-              <a:t>12/11/2024</a:t>
+              <a:t>12/12/2024</a:t>
             </a:fld>
             <a:endParaRPr lang="en-US"/>
           </a:p>
@@ -907,7 +1016,7 @@
           <a:p>
             <a:fld id="{4CDE23C7-78A4-413A-A84B-93D4CC0A9EB1}" type="datetimeFigureOut">
               <a:rPr lang="en-US" smtClean="0"/>
-              <a:t>12/11/2024</a:t>
+              <a:t>12/12/2024</a:t>
             </a:fld>
             <a:endParaRPr lang="en-US"/>
           </a:p>
@@ -1115,7 +1224,7 @@
           <a:p>
             <a:fld id="{4CDE23C7-78A4-413A-A84B-93D4CC0A9EB1}" type="datetimeFigureOut">
               <a:rPr lang="en-US" smtClean="0"/>
-              <a:t>12/11/2024</a:t>
+              <a:t>12/12/2024</a:t>
             </a:fld>
             <a:endParaRPr lang="en-US"/>
           </a:p>
@@ -1313,7 +1422,7 @@
           <a:p>
             <a:fld id="{4CDE23C7-78A4-413A-A84B-93D4CC0A9EB1}" type="datetimeFigureOut">
               <a:rPr lang="en-US" smtClean="0"/>
-              <a:t>12/11/2024</a:t>
+              <a:t>12/12/2024</a:t>
             </a:fld>
             <a:endParaRPr lang="en-US"/>
           </a:p>
@@ -1590,7 +1699,7 @@
           <a:p>
             <a:fld id="{4CDE23C7-78A4-413A-A84B-93D4CC0A9EB1}" type="datetimeFigureOut">
               <a:rPr lang="en-US" smtClean="0"/>
-              <a:t>12/11/2024</a:t>
+              <a:t>12/12/2024</a:t>
             </a:fld>
             <a:endParaRPr lang="en-US"/>
           </a:p>
@@ -1855,7 +1964,7 @@
           <a:p>
             <a:fld id="{4CDE23C7-78A4-413A-A84B-93D4CC0A9EB1}" type="datetimeFigureOut">
               <a:rPr lang="en-US" smtClean="0"/>
-              <a:t>12/11/2024</a:t>
+              <a:t>12/12/2024</a:t>
             </a:fld>
             <a:endParaRPr lang="en-US"/>
           </a:p>
@@ -2271,7 +2380,7 @@
           <a:p>
             <a:fld id="{4CDE23C7-78A4-413A-A84B-93D4CC0A9EB1}" type="datetimeFigureOut">
               <a:rPr lang="en-US" smtClean="0"/>
-              <a:t>12/11/2024</a:t>
+              <a:t>12/12/2024</a:t>
             </a:fld>
             <a:endParaRPr lang="en-US"/>
           </a:p>
@@ -2412,7 +2521,7 @@
           <a:p>
             <a:fld id="{4CDE23C7-78A4-413A-A84B-93D4CC0A9EB1}" type="datetimeFigureOut">
               <a:rPr lang="en-US" smtClean="0"/>
-              <a:t>12/11/2024</a:t>
+              <a:t>12/12/2024</a:t>
             </a:fld>
             <a:endParaRPr lang="en-US"/>
           </a:p>
@@ -2525,7 +2634,7 @@
           <a:p>
             <a:fld id="{4CDE23C7-78A4-413A-A84B-93D4CC0A9EB1}" type="datetimeFigureOut">
               <a:rPr lang="en-US" smtClean="0"/>
-              <a:t>12/11/2024</a:t>
+              <a:t>12/12/2024</a:t>
             </a:fld>
             <a:endParaRPr lang="en-US"/>
           </a:p>
@@ -2836,7 +2945,7 @@
           <a:p>
             <a:fld id="{4CDE23C7-78A4-413A-A84B-93D4CC0A9EB1}" type="datetimeFigureOut">
               <a:rPr lang="en-US" smtClean="0"/>
-              <a:t>12/11/2024</a:t>
+              <a:t>12/12/2024</a:t>
             </a:fld>
             <a:endParaRPr lang="en-US"/>
           </a:p>
@@ -3124,7 +3233,7 @@
           <a:p>
             <a:fld id="{4CDE23C7-78A4-413A-A84B-93D4CC0A9EB1}" type="datetimeFigureOut">
               <a:rPr lang="en-US" smtClean="0"/>
-              <a:t>12/11/2024</a:t>
+              <a:t>12/12/2024</a:t>
             </a:fld>
             <a:endParaRPr lang="en-US"/>
           </a:p>
@@ -3364,7 +3473,7 @@
             <a:fld id="{4CDE23C7-78A4-413A-A84B-93D4CC0A9EB1}" type="datetimeFigureOut">
               <a:rPr lang="en-US" smtClean="0"/>
               <a:pPr/>
-              <a:t>12/11/2024</a:t>
+              <a:t>12/12/2024</a:t>
             </a:fld>
             <a:endParaRPr lang="en-US" dirty="0"/>
           </a:p>
@@ -6059,7 +6168,13 @@
     </p:bg>
     <p:spTree>
       <p:nvGrpSpPr>
-        <p:cNvPr id="1" name=""/>
+        <p:cNvPr id="1" name="">
+          <a:extLst>
+            <a:ext uri="{FF2B5EF4-FFF2-40B4-BE49-F238E27FC236}">
+              <a16:creationId xmlns:a16="http://schemas.microsoft.com/office/drawing/2014/main" id="{68A976F3-01C3-A748-C834-480053868980}"/>
+            </a:ext>
+          </a:extLst>
+        </p:cNvPr>
         <p:cNvGrpSpPr/>
         <p:nvPr/>
       </p:nvGrpSpPr>
@@ -6076,7 +6191,7 @@
           <p:cNvPr id="8" name="Rectangle 7">
             <a:extLst>
               <a:ext uri="{FF2B5EF4-FFF2-40B4-BE49-F238E27FC236}">
-                <a16:creationId xmlns:a16="http://schemas.microsoft.com/office/drawing/2014/main" id="{B00A26AB-E1BA-4180-829A-BF134BA81B4A}"/>
+                <a16:creationId xmlns:a16="http://schemas.microsoft.com/office/drawing/2014/main" id="{FE95F3BC-438D-BBE3-AF3E-5EC6636BB74C}"/>
               </a:ext>
               <a:ext uri="{C183D7F6-B498-43B3-948B-1728B52AA6E4}">
                 <adec:decorative xmlns:adec="http://schemas.microsoft.com/office/drawing/2017/decorative" val="1"/>
@@ -6152,7 +6267,7 @@
           <p:cNvPr id="10" name="Rectangle 9">
             <a:extLst>
               <a:ext uri="{FF2B5EF4-FFF2-40B4-BE49-F238E27FC236}">
-                <a16:creationId xmlns:a16="http://schemas.microsoft.com/office/drawing/2014/main" id="{499D94A9-B2E2-46A9-B26F-8AE3BFD83A2F}"/>
+                <a16:creationId xmlns:a16="http://schemas.microsoft.com/office/drawing/2014/main" id="{646DEC7E-F1DF-8CAD-53DF-6F68F611DF24}"/>
               </a:ext>
               <a:ext uri="{C183D7F6-B498-43B3-948B-1728B52AA6E4}">
                 <adec:decorative xmlns:adec="http://schemas.microsoft.com/office/drawing/2017/decorative" val="1"/>
@@ -6218,7 +6333,7 @@
           <p:cNvPr id="3" name="Picture 2" descr="A logo of a drink with flames&#10;&#10;Description automatically generated">
             <a:extLst>
               <a:ext uri="{FF2B5EF4-FFF2-40B4-BE49-F238E27FC236}">
-                <a16:creationId xmlns:a16="http://schemas.microsoft.com/office/drawing/2014/main" id="{EB7793F4-B8D3-6F0F-F39E-296728079F7E}"/>
+                <a16:creationId xmlns:a16="http://schemas.microsoft.com/office/drawing/2014/main" id="{9AF02D52-8E58-A86B-30E9-B90840457D84}"/>
               </a:ext>
             </a:extLst>
           </p:cNvPr>
@@ -6228,7 +6343,7 @@
           <p:nvPr/>
         </p:nvPicPr>
         <p:blipFill>
-          <a:blip r:embed="rId2">
+          <a:blip r:embed="rId3">
             <a:alphaModFix amt="40000"/>
             <a:extLst>
               <a:ext uri="{28A0092B-C50C-407E-A947-70E740481C1C}">
@@ -6241,7 +6356,7 @@
         </p:blipFill>
         <p:spPr>
           <a:xfrm>
-            <a:off x="-94824" y="-97769"/>
+            <a:off x="20" y="10"/>
             <a:ext cx="12191980" cy="6857990"/>
           </a:xfrm>
           <a:prstGeom prst="rect">
@@ -6254,7 +6369,7 @@
           <p:cNvPr id="12" name="Straight Connector 11">
             <a:extLst>
               <a:ext uri="{FF2B5EF4-FFF2-40B4-BE49-F238E27FC236}">
-                <a16:creationId xmlns:a16="http://schemas.microsoft.com/office/drawing/2014/main" id="{F498A24E-F6AC-42A6-8BC2-1A91D9768FEF}"/>
+                <a16:creationId xmlns:a16="http://schemas.microsoft.com/office/drawing/2014/main" id="{B45651F2-3209-F55E-5F28-1C8888D0AC0D}"/>
               </a:ext>
               <a:ext uri="{C183D7F6-B498-43B3-948B-1728B52AA6E4}">
                 <adec:decorative xmlns:adec="http://schemas.microsoft.com/office/drawing/2017/decorative" val="1"/>
@@ -6306,7 +6421,7 @@
           <p:cNvPr id="14" name="Straight Connector 13">
             <a:extLst>
               <a:ext uri="{FF2B5EF4-FFF2-40B4-BE49-F238E27FC236}">
-                <a16:creationId xmlns:a16="http://schemas.microsoft.com/office/drawing/2014/main" id="{6679D7AD-A487-4DDE-950D-32D24100B109}"/>
+                <a16:creationId xmlns:a16="http://schemas.microsoft.com/office/drawing/2014/main" id="{B5B33E15-9456-5C37-4069-7B7ACEE91A9C}"/>
               </a:ext>
               <a:ext uri="{C183D7F6-B498-43B3-948B-1728B52AA6E4}">
                 <adec:decorative xmlns:adec="http://schemas.microsoft.com/office/drawing/2017/decorative" val="1"/>
@@ -6353,6 +6468,401 @@
           </a:fontRef>
         </p:style>
       </p:cxnSp>
+      <p:pic>
+        <p:nvPicPr>
+          <p:cNvPr id="4" name="Kép 3" descr="A képen szöveg, képernyőkép, szám, Párhuzamos látható&#10;&#10;Automatikusan generált leírás">
+            <a:extLst>
+              <a:ext uri="{FF2B5EF4-FFF2-40B4-BE49-F238E27FC236}">
+                <a16:creationId xmlns:a16="http://schemas.microsoft.com/office/drawing/2014/main" id="{5F1FDA15-62E4-CE12-18D5-0FD705919093}"/>
+              </a:ext>
+            </a:extLst>
+          </p:cNvPr>
+          <p:cNvPicPr>
+            <a:picLocks noChangeAspect="1"/>
+          </p:cNvPicPr>
+          <p:nvPr/>
+        </p:nvPicPr>
+        <p:blipFill>
+          <a:blip r:embed="rId4">
+            <a:extLst>
+              <a:ext uri="{28A0092B-C50C-407E-A947-70E740481C1C}">
+                <a14:useLocalDpi xmlns:a14="http://schemas.microsoft.com/office/drawing/2010/main" val="0"/>
+              </a:ext>
+            </a:extLst>
+          </a:blip>
+          <a:stretch>
+            <a:fillRect/>
+          </a:stretch>
+        </p:blipFill>
+        <p:spPr>
+          <a:xfrm>
+            <a:off x="3916240" y="1219262"/>
+            <a:ext cx="4359519" cy="4549891"/>
+          </a:xfrm>
+          <a:prstGeom prst="rect">
+            <a:avLst/>
+          </a:prstGeom>
+        </p:spPr>
+      </p:pic>
+      <p:sp>
+        <p:nvSpPr>
+          <p:cNvPr id="7" name="TextBox 5">
+            <a:extLst>
+              <a:ext uri="{FF2B5EF4-FFF2-40B4-BE49-F238E27FC236}">
+                <a16:creationId xmlns:a16="http://schemas.microsoft.com/office/drawing/2014/main" id="{44A9D094-5884-900B-A15C-2111E79FF359}"/>
+              </a:ext>
+            </a:extLst>
+          </p:cNvPr>
+          <p:cNvSpPr txBox="1"/>
+          <p:nvPr/>
+        </p:nvSpPr>
+        <p:spPr>
+          <a:xfrm>
+            <a:off x="643467" y="733313"/>
+            <a:ext cx="5546633" cy="553998"/>
+          </a:xfrm>
+          <a:prstGeom prst="rect">
+            <a:avLst/>
+          </a:prstGeom>
+          <a:noFill/>
+        </p:spPr>
+        <p:txBody>
+          <a:bodyPr wrap="square" rtlCol="0">
+            <a:spAutoFit/>
+          </a:bodyPr>
+          <a:lstStyle/>
+          <a:p>
+            <a:r>
+              <a:rPr lang="hu-HU" sz="3000" b="1" dirty="0">
+                <a:solidFill>
+                  <a:schemeClr val="bg1"/>
+                </a:solidFill>
+              </a:rPr>
+              <a:t>Adatbázis:</a:t>
+            </a:r>
+          </a:p>
+        </p:txBody>
+      </p:sp>
+    </p:spTree>
+    <p:extLst>
+      <p:ext uri="{BB962C8B-B14F-4D97-AF65-F5344CB8AC3E}">
+        <p14:creationId xmlns:p14="http://schemas.microsoft.com/office/powerpoint/2010/main" val="1337591089"/>
+      </p:ext>
+    </p:extLst>
+  </p:cSld>
+  <p:clrMapOvr>
+    <a:masterClrMapping/>
+  </p:clrMapOvr>
+</p:sld>
+</file>
+
+<file path=ppt/slides/slide6.xml><?xml version="1.0" encoding="utf-8"?>
+<p:sld xmlns:a="http://schemas.openxmlformats.org/drawingml/2006/main" xmlns:r="http://schemas.openxmlformats.org/officeDocument/2006/relationships" xmlns:p="http://schemas.openxmlformats.org/presentationml/2006/main">
+  <p:cSld>
+    <p:bg>
+      <p:bgPr>
+        <a:solidFill>
+          <a:schemeClr val="bg1"/>
+        </a:solidFill>
+        <a:effectLst/>
+      </p:bgPr>
+    </p:bg>
+    <p:spTree>
+      <p:nvGrpSpPr>
+        <p:cNvPr id="1" name=""/>
+        <p:cNvGrpSpPr/>
+        <p:nvPr/>
+      </p:nvGrpSpPr>
+      <p:grpSpPr>
+        <a:xfrm>
+          <a:off x="0" y="0"/>
+          <a:ext cx="0" cy="0"/>
+          <a:chOff x="0" y="0"/>
+          <a:chExt cx="0" cy="0"/>
+        </a:xfrm>
+      </p:grpSpPr>
+      <p:sp useBgFill="1">
+        <p:nvSpPr>
+          <p:cNvPr id="8" name="Rectangle 7">
+            <a:extLst>
+              <a:ext uri="{FF2B5EF4-FFF2-40B4-BE49-F238E27FC236}">
+                <a16:creationId xmlns:a16="http://schemas.microsoft.com/office/drawing/2014/main" id="{B00A26AB-E1BA-4180-829A-BF134BA81B4A}"/>
+              </a:ext>
+              <a:ext uri="{C183D7F6-B498-43B3-948B-1728B52AA6E4}">
+                <adec:decorative xmlns:adec="http://schemas.microsoft.com/office/drawing/2017/decorative" val="1"/>
+              </a:ext>
+            </a:extLst>
+          </p:cNvPr>
+          <p:cNvSpPr>
+            <a:spLocks noGrp="1" noRot="1" noChangeAspect="1" noMove="1" noResize="1" noEditPoints="1" noAdjustHandles="1" noChangeArrowheads="1" noChangeShapeType="1" noTextEdit="1"/>
+          </p:cNvSpPr>
+          <p:nvPr>
+            <p:extLst>
+              <p:ext uri="{386F3935-93C4-4BCD-93E2-E3B085C9AB24}">
+                <p16:designElem xmlns:p16="http://schemas.microsoft.com/office/powerpoint/2015/main" val="1"/>
+              </p:ext>
+            </p:extLst>
+          </p:nvPr>
+        </p:nvSpPr>
+        <p:spPr>
+          <a:xfrm>
+            <a:off x="0" y="0"/>
+            <a:ext cx="12192000" cy="6858000"/>
+          </a:xfrm>
+          <a:prstGeom prst="rect">
+            <a:avLst/>
+          </a:prstGeom>
+          <a:ln w="12700" cap="flat" cmpd="sng" algn="ctr">
+            <a:noFill/>
+            <a:prstDash val="solid"/>
+            <a:miter lim="800000"/>
+          </a:ln>
+          <a:effectLst/>
+          <a:extLst>
+            <a:ext uri="{91240B29-F687-4F45-9708-019B960494DF}">
+              <a14:hiddenLine xmlns:a14="http://schemas.microsoft.com/office/drawing/2010/main" w="12700" cap="flat" cmpd="sng" algn="ctr">
+                <a:solidFill>
+                  <a:schemeClr val="accent1">
+                    <a:shade val="50000"/>
+                  </a:schemeClr>
+                </a:solidFill>
+                <a:prstDash val="solid"/>
+                <a:miter lim="800000"/>
+              </a14:hiddenLine>
+            </a:ext>
+          </a:extLst>
+        </p:spPr>
+        <p:style>
+          <a:lnRef idx="2">
+            <a:schemeClr val="accent1">
+              <a:shade val="50000"/>
+            </a:schemeClr>
+          </a:lnRef>
+          <a:fillRef idx="1">
+            <a:schemeClr val="accent1"/>
+          </a:fillRef>
+          <a:effectRef idx="0">
+            <a:schemeClr val="accent1"/>
+          </a:effectRef>
+          <a:fontRef idx="minor">
+            <a:schemeClr val="lt1"/>
+          </a:fontRef>
+        </p:style>
+        <p:txBody>
+          <a:bodyPr rtlCol="0" anchor="ctr"/>
+          <a:lstStyle/>
+          <a:p>
+            <a:pPr algn="ctr"/>
+            <a:endParaRPr lang="en-US"/>
+          </a:p>
+        </p:txBody>
+      </p:sp>
+      <p:sp>
+        <p:nvSpPr>
+          <p:cNvPr id="10" name="Rectangle 9">
+            <a:extLst>
+              <a:ext uri="{FF2B5EF4-FFF2-40B4-BE49-F238E27FC236}">
+                <a16:creationId xmlns:a16="http://schemas.microsoft.com/office/drawing/2014/main" id="{499D94A9-B2E2-46A9-B26F-8AE3BFD83A2F}"/>
+              </a:ext>
+              <a:ext uri="{C183D7F6-B498-43B3-948B-1728B52AA6E4}">
+                <adec:decorative xmlns:adec="http://schemas.microsoft.com/office/drawing/2017/decorative" val="1"/>
+              </a:ext>
+            </a:extLst>
+          </p:cNvPr>
+          <p:cNvSpPr>
+            <a:spLocks noGrp="1" noRot="1" noChangeAspect="1" noMove="1" noResize="1" noEditPoints="1" noAdjustHandles="1" noChangeArrowheads="1" noChangeShapeType="1" noTextEdit="1"/>
+          </p:cNvSpPr>
+          <p:nvPr>
+            <p:extLst>
+              <p:ext uri="{386F3935-93C4-4BCD-93E2-E3B085C9AB24}">
+                <p16:designElem xmlns:p16="http://schemas.microsoft.com/office/powerpoint/2015/main" val="1"/>
+              </p:ext>
+            </p:extLst>
+          </p:nvPr>
+        </p:nvSpPr>
+        <p:spPr>
+          <a:xfrm>
+            <a:off x="0" y="0"/>
+            <a:ext cx="12192000" cy="6858000"/>
+          </a:xfrm>
+          <a:prstGeom prst="rect">
+            <a:avLst/>
+          </a:prstGeom>
+          <a:solidFill>
+            <a:srgbClr val="000000"/>
+          </a:solidFill>
+          <a:ln w="12700" cap="flat" cmpd="sng" algn="ctr">
+            <a:noFill/>
+            <a:prstDash val="solid"/>
+            <a:miter lim="800000"/>
+          </a:ln>
+          <a:effectLst/>
+        </p:spPr>
+        <p:style>
+          <a:lnRef idx="2">
+            <a:schemeClr val="accent1">
+              <a:shade val="50000"/>
+            </a:schemeClr>
+          </a:lnRef>
+          <a:fillRef idx="1">
+            <a:schemeClr val="accent1"/>
+          </a:fillRef>
+          <a:effectRef idx="0">
+            <a:schemeClr val="accent1"/>
+          </a:effectRef>
+          <a:fontRef idx="minor">
+            <a:schemeClr val="lt1"/>
+          </a:fontRef>
+        </p:style>
+        <p:txBody>
+          <a:bodyPr rtlCol="0" anchor="ctr"/>
+          <a:lstStyle/>
+          <a:p>
+            <a:pPr algn="ctr"/>
+            <a:endParaRPr lang="en-US"/>
+          </a:p>
+        </p:txBody>
+      </p:sp>
+      <p:pic>
+        <p:nvPicPr>
+          <p:cNvPr id="3" name="Picture 2" descr="A logo of a drink with flames&#10;&#10;Description automatically generated">
+            <a:extLst>
+              <a:ext uri="{FF2B5EF4-FFF2-40B4-BE49-F238E27FC236}">
+                <a16:creationId xmlns:a16="http://schemas.microsoft.com/office/drawing/2014/main" id="{EB7793F4-B8D3-6F0F-F39E-296728079F7E}"/>
+              </a:ext>
+            </a:extLst>
+          </p:cNvPr>
+          <p:cNvPicPr>
+            <a:picLocks noChangeAspect="1"/>
+          </p:cNvPicPr>
+          <p:nvPr/>
+        </p:nvPicPr>
+        <p:blipFill>
+          <a:blip r:embed="rId2">
+            <a:alphaModFix amt="40000"/>
+            <a:extLst>
+              <a:ext uri="{28A0092B-C50C-407E-A947-70E740481C1C}">
+                <a14:useLocalDpi xmlns:a14="http://schemas.microsoft.com/office/drawing/2010/main" val="0"/>
+              </a:ext>
+            </a:extLst>
+          </a:blip>
+          <a:srcRect t="20273" b="23477"/>
+          <a:stretch/>
+        </p:blipFill>
+        <p:spPr>
+          <a:xfrm>
+            <a:off x="-94824" y="-97769"/>
+            <a:ext cx="12191980" cy="6857990"/>
+          </a:xfrm>
+          <a:prstGeom prst="rect">
+            <a:avLst/>
+          </a:prstGeom>
+        </p:spPr>
+      </p:pic>
+      <p:cxnSp>
+        <p:nvCxnSpPr>
+          <p:cNvPr id="12" name="Straight Connector 11">
+            <a:extLst>
+              <a:ext uri="{FF2B5EF4-FFF2-40B4-BE49-F238E27FC236}">
+                <a16:creationId xmlns:a16="http://schemas.microsoft.com/office/drawing/2014/main" id="{F498A24E-F6AC-42A6-8BC2-1A91D9768FEF}"/>
+              </a:ext>
+              <a:ext uri="{C183D7F6-B498-43B3-948B-1728B52AA6E4}">
+                <adec:decorative xmlns:adec="http://schemas.microsoft.com/office/drawing/2017/decorative" val="1"/>
+              </a:ext>
+            </a:extLst>
+          </p:cNvPr>
+          <p:cNvCxnSpPr>
+            <a:cxnSpLocks noGrp="1" noRot="1" noChangeAspect="1" noMove="1" noResize="1" noEditPoints="1" noAdjustHandles="1" noChangeArrowheads="1" noChangeShapeType="1"/>
+          </p:cNvCxnSpPr>
+          <p:nvPr>
+            <p:extLst>
+              <p:ext uri="{386F3935-93C4-4BCD-93E2-E3B085C9AB24}">
+                <p16:designElem xmlns:p16="http://schemas.microsoft.com/office/powerpoint/2015/main" val="1"/>
+              </p:ext>
+            </p:extLst>
+          </p:nvPr>
+        </p:nvCxnSpPr>
+        <p:spPr>
+          <a:xfrm>
+            <a:off x="643467" y="678719"/>
+            <a:ext cx="10905066" cy="0"/>
+          </a:xfrm>
+          <a:prstGeom prst="line">
+            <a:avLst/>
+          </a:prstGeom>
+          <a:ln w="38100">
+            <a:solidFill>
+              <a:srgbClr val="FFFFFF"/>
+            </a:solidFill>
+          </a:ln>
+        </p:spPr>
+        <p:style>
+          <a:lnRef idx="1">
+            <a:schemeClr val="accent1"/>
+          </a:lnRef>
+          <a:fillRef idx="0">
+            <a:schemeClr val="accent1"/>
+          </a:fillRef>
+          <a:effectRef idx="0">
+            <a:schemeClr val="accent1"/>
+          </a:effectRef>
+          <a:fontRef idx="minor">
+            <a:schemeClr val="tx1"/>
+          </a:fontRef>
+        </p:style>
+      </p:cxnSp>
+      <p:cxnSp>
+        <p:nvCxnSpPr>
+          <p:cNvPr id="14" name="Straight Connector 13">
+            <a:extLst>
+              <a:ext uri="{FF2B5EF4-FFF2-40B4-BE49-F238E27FC236}">
+                <a16:creationId xmlns:a16="http://schemas.microsoft.com/office/drawing/2014/main" id="{6679D7AD-A487-4DDE-950D-32D24100B109}"/>
+              </a:ext>
+              <a:ext uri="{C183D7F6-B498-43B3-948B-1728B52AA6E4}">
+                <adec:decorative xmlns:adec="http://schemas.microsoft.com/office/drawing/2017/decorative" val="1"/>
+              </a:ext>
+            </a:extLst>
+          </p:cNvPr>
+          <p:cNvCxnSpPr>
+            <a:cxnSpLocks noGrp="1" noRot="1" noChangeAspect="1" noMove="1" noResize="1" noEditPoints="1" noAdjustHandles="1" noChangeArrowheads="1" noChangeShapeType="1"/>
+          </p:cNvCxnSpPr>
+          <p:nvPr>
+            <p:extLst>
+              <p:ext uri="{386F3935-93C4-4BCD-93E2-E3B085C9AB24}">
+                <p16:designElem xmlns:p16="http://schemas.microsoft.com/office/powerpoint/2015/main" val="1"/>
+              </p:ext>
+            </p:extLst>
+          </p:nvPr>
+        </p:nvCxnSpPr>
+        <p:spPr>
+          <a:xfrm>
+            <a:off x="643467" y="6309695"/>
+            <a:ext cx="10905066" cy="0"/>
+          </a:xfrm>
+          <a:prstGeom prst="line">
+            <a:avLst/>
+          </a:prstGeom>
+          <a:ln w="6350">
+            <a:solidFill>
+              <a:srgbClr val="FFFFFF"/>
+            </a:solidFill>
+          </a:ln>
+        </p:spPr>
+        <p:style>
+          <a:lnRef idx="1">
+            <a:schemeClr val="accent1"/>
+          </a:lnRef>
+          <a:fillRef idx="0">
+            <a:schemeClr val="accent1"/>
+          </a:fillRef>
+          <a:effectRef idx="0">
+            <a:schemeClr val="accent1"/>
+          </a:effectRef>
+          <a:fontRef idx="minor">
+            <a:schemeClr val="tx1"/>
+          </a:fontRef>
+        </p:style>
+      </p:cxnSp>
       <p:sp>
         <p:nvSpPr>
           <p:cNvPr id="4" name="TextBox 3">
@@ -6722,7 +7232,7 @@
 </p:sld>
 </file>
 
-<file path=ppt/slides/slide6.xml><?xml version="1.0" encoding="utf-8"?>
+<file path=ppt/slides/slide7.xml><?xml version="1.0" encoding="utf-8"?>
 <p:sld xmlns:a="http://schemas.openxmlformats.org/drawingml/2006/main" xmlns:r="http://schemas.openxmlformats.org/officeDocument/2006/relationships" xmlns:p="http://schemas.openxmlformats.org/presentationml/2006/main">
   <p:cSld>
     <p:bg>
@@ -7107,7 +7617,7 @@
         </p:nvSpPr>
         <p:spPr>
           <a:xfrm>
-            <a:off x="0" y="2051626"/>
+            <a:off x="-19" y="2894043"/>
             <a:ext cx="12191999" cy="1200329"/>
           </a:xfrm>
           <a:prstGeom prst="rect">
@@ -7128,7 +7638,7 @@
                   <a:schemeClr val="bg1"/>
                 </a:solidFill>
               </a:rPr>
-              <a:t>Köszönöm a figyelmet</a:t>
+              <a:t>Köszönöm a figyelmet!</a:t>
             </a:r>
           </a:p>
         </p:txBody>
